--- a/cs701/slides/week-14.pptx
+++ b/cs701/slides/week-14.pptx
@@ -21578,7 +21578,7 @@
                   <a:srgbClr val="01AEFD"/>
                 </a:solidFill>
               </a:rPr>
-              <a:t>In Wordle.java   -   replace a line</a:t>
+              <a:t>In last week’s Wordle.java   -   replace a line</a:t>
             </a:r>
           </a:p>
         </p:txBody>
